--- a/test-output.pptx
+++ b/test-output.pptx
@@ -1589,7 +1589,29 @@
       </p:grpSpPr>
       <p:sp>
         <p:nvSpPr>
-          <p:cNvPr id="2" name="Text 0"/>
+          <p:cNvPr id="2" name="Shape 0"/>
+          <p:cNvSpPr/>
+          <p:nvPr/>
+        </p:nvSpPr>
+        <p:spPr>
+          <a:xfrm>
+            <a:off x="6858000" y="457200"/>
+            <a:ext cx="2743200" cy="2743200"/>
+          </a:xfrm>
+          <a:prstGeom prst="ellipse">
+            <a:avLst/>
+          </a:prstGeom>
+          <a:solidFill>
+            <a:srgbClr val="A78BFA">
+              <a:alpha val="30000"/>
+            </a:srgbClr>
+          </a:solidFill>
+          <a:ln/>
+        </p:spPr>
+      </p:sp>
+      <p:sp>
+        <p:nvSpPr>
+          <p:cNvPr id="3" name="Text 1"/>
           <p:cNvSpPr/>
           <p:nvPr/>
         </p:nvSpPr>
@@ -1625,7 +1647,7 @@
       </p:sp>
       <p:sp>
         <p:nvSpPr>
-          <p:cNvPr id="3" name="Text 1"/>
+          <p:cNvPr id="4" name="Text 2"/>
           <p:cNvSpPr/>
           <p:nvPr/>
         </p:nvSpPr>
@@ -1661,7 +1683,7 @@
       </p:sp>
       <p:sp>
         <p:nvSpPr>
-          <p:cNvPr id="4" name="Text 2"/>
+          <p:cNvPr id="5" name="Text 3"/>
           <p:cNvSpPr/>
           <p:nvPr/>
         </p:nvSpPr>
@@ -1689,7 +1711,7 @@
                   <a:srgbClr val="FFFFFF"/>
                 </a:solidFill>
               </a:rPr>
-              <a:t>2025/11/26</a:t>
+              <a:t>2025/12/9</a:t>
             </a:r>
             <a:endParaRPr lang="en-US" sz="1400" dirty="0"/>
           </a:p>
@@ -1709,7 +1731,7 @@
     <p:bg>
       <p:bgPr>
         <a:solidFill>
-          <a:srgbClr val="FFFFFF"/>
+          <a:srgbClr val="F9FAFB"/>
         </a:solidFill>
       </p:bgPr>
     </p:bg>
@@ -1736,7 +1758,7 @@
         <p:spPr>
           <a:xfrm>
             <a:off x="0" y="0"/>
-            <a:ext cx="9144000" cy="914400"/>
+            <a:ext cx="137160" cy="6858000"/>
           </a:xfrm>
           <a:prstGeom prst="rect">
             <a:avLst/>
@@ -1749,14 +1771,41 @@
       </p:sp>
       <p:sp>
         <p:nvSpPr>
-          <p:cNvPr id="3" name="Text 1"/>
-          <p:cNvSpPr/>
-          <p:nvPr/>
-        </p:nvSpPr>
-        <p:spPr>
-          <a:xfrm>
-            <a:off x="457200" y="182880"/>
-            <a:ext cx="8229600" cy="548640"/>
+          <p:cNvPr id="3" name="Shape 1"/>
+          <p:cNvSpPr/>
+          <p:nvPr/>
+        </p:nvSpPr>
+        <p:spPr>
+          <a:xfrm>
+            <a:off x="274320" y="457200"/>
+            <a:ext cx="8595360" cy="822960"/>
+          </a:xfrm>
+          <a:prstGeom prst="rect">
+            <a:avLst/>
+          </a:prstGeom>
+          <a:solidFill>
+            <a:srgbClr val="FFFFFF"/>
+          </a:solidFill>
+          <a:ln/>
+          <a:effectLst>
+            <a:outerShdw sx="100000" sy="100000" kx="0" ky="0" algn="bl" rotWithShape="0" blurRad="101600" dist="25400" dir="5400000">
+              <a:srgbClr val="000000">
+                <a:alpha val="10000"/>
+              </a:srgbClr>
+            </a:outerShdw>
+          </a:effectLst>
+        </p:spPr>
+      </p:sp>
+      <p:sp>
+        <p:nvSpPr>
+          <p:cNvPr id="4" name="Text 2"/>
+          <p:cNvSpPr/>
+          <p:nvPr/>
+        </p:nvSpPr>
+        <p:spPr>
+          <a:xfrm>
+            <a:off x="457200" y="548640"/>
+            <a:ext cx="8229600" cy="640080"/>
           </a:xfrm>
           <a:prstGeom prst="rect">
             <a:avLst/>
@@ -1774,7 +1823,7 @@
             <a:r>
               <a:rPr lang="en-US" sz="2800" b="1" dirty="0">
                 <a:solidFill>
-                  <a:srgbClr val="FFFFFF"/>
+                  <a:srgbClr val="7C3AED"/>
                 </a:solidFill>
               </a:rPr>
               <a:t>1. 市场调研</a:t>
@@ -1785,14 +1834,41 @@
       </p:sp>
       <p:sp>
         <p:nvSpPr>
-          <p:cNvPr id="4" name="Text 2"/>
-          <p:cNvSpPr/>
-          <p:nvPr/>
-        </p:nvSpPr>
-        <p:spPr>
-          <a:xfrm>
-            <a:off x="457200" y="1371600"/>
-            <a:ext cx="8229600" cy="3657600"/>
+          <p:cNvPr id="5" name="Shape 3"/>
+          <p:cNvSpPr/>
+          <p:nvPr/>
+        </p:nvSpPr>
+        <p:spPr>
+          <a:xfrm>
+            <a:off x="274320" y="1554480"/>
+            <a:ext cx="8595360" cy="4389120"/>
+          </a:xfrm>
+          <a:prstGeom prst="rect">
+            <a:avLst/>
+          </a:prstGeom>
+          <a:solidFill>
+            <a:srgbClr val="FFFFFF"/>
+          </a:solidFill>
+          <a:ln/>
+          <a:effectLst>
+            <a:outerShdw sx="100000" sy="100000" kx="0" ky="0" algn="bl" rotWithShape="0" blurRad="101600" dist="25400" dir="5400000">
+              <a:srgbClr val="000000">
+                <a:alpha val="10000"/>
+              </a:srgbClr>
+            </a:outerShdw>
+          </a:effectLst>
+        </p:spPr>
+      </p:sp>
+      <p:sp>
+        <p:nvSpPr>
+          <p:cNvPr id="6" name="Text 4"/>
+          <p:cNvSpPr/>
+          <p:nvPr/>
+        </p:nvSpPr>
+        <p:spPr>
+          <a:xfrm>
+            <a:off x="548640" y="1828800"/>
+            <a:ext cx="8046720" cy="3840480"/>
           </a:xfrm>
           <a:prstGeom prst="rect">
             <a:avLst/>
@@ -1805,6 +1881,9 @@
           <a:lstStyle/>
           <a:p>
             <a:pPr indent="0" marL="0">
+              <a:lnSpc>
+                <a:spcPts val="2400"/>
+              </a:lnSpc>
               <a:buNone/>
             </a:pPr>
             <a:r>
@@ -1819,12 +1898,18 @@
           </a:p>
           <a:p>
             <a:pPr indent="0" marL="0">
+              <a:lnSpc>
+                <a:spcPts val="2400"/>
+              </a:lnSpc>
               <a:buNone/>
             </a:pPr>
             <a:endParaRPr lang="en-US" sz="1600" dirty="0"/>
           </a:p>
           <a:p>
             <a:pPr indent="0" marL="0">
+              <a:lnSpc>
+                <a:spcPts val="2400"/>
+              </a:lnSpc>
               <a:buNone/>
             </a:pPr>
             <a:r>
@@ -1839,6 +1924,9 @@
           </a:p>
           <a:p>
             <a:pPr indent="0" marL="0">
+              <a:lnSpc>
+                <a:spcPts val="2400"/>
+              </a:lnSpc>
               <a:buNone/>
             </a:pPr>
             <a:r>
@@ -1853,6 +1941,9 @@
           </a:p>
           <a:p>
             <a:pPr indent="0" marL="0">
+              <a:lnSpc>
+                <a:spcPts val="2400"/>
+              </a:lnSpc>
               <a:buNone/>
             </a:pPr>
             <a:r>
@@ -1869,7 +1960,7 @@
       </p:sp>
       <p:sp>
         <p:nvSpPr>
-          <p:cNvPr id="5" name="Text 3"/>
+          <p:cNvPr id="7" name="Text 5"/>
           <p:cNvSpPr/>
           <p:nvPr/>
         </p:nvSpPr>
@@ -1905,7 +1996,7 @@
       </p:sp>
       <p:sp>
         <p:nvSpPr>
-          <p:cNvPr id="6" name="Text 4"/>
+          <p:cNvPr id="8" name="Text 6"/>
           <p:cNvSpPr/>
           <p:nvPr/>
         </p:nvSpPr>
@@ -1933,7 +2024,7 @@
                   <a:srgbClr val="9CA3AF"/>
                 </a:solidFill>
               </a:rPr>
-              <a:t>2025/11/26</a:t>
+              <a:t>2025/12/9</a:t>
             </a:r>
             <a:endParaRPr lang="en-US" sz="1000" dirty="0"/>
           </a:p>
@@ -1953,7 +2044,7 @@
     <p:bg>
       <p:bgPr>
         <a:solidFill>
-          <a:srgbClr val="FFFFFF"/>
+          <a:srgbClr val="F9FAFB"/>
         </a:solidFill>
       </p:bgPr>
     </p:bg>
@@ -1980,7 +2071,7 @@
         <p:spPr>
           <a:xfrm>
             <a:off x="0" y="0"/>
-            <a:ext cx="9144000" cy="914400"/>
+            <a:ext cx="137160" cy="6858000"/>
           </a:xfrm>
           <a:prstGeom prst="rect">
             <a:avLst/>
@@ -1993,14 +2084,41 @@
       </p:sp>
       <p:sp>
         <p:nvSpPr>
-          <p:cNvPr id="3" name="Text 1"/>
-          <p:cNvSpPr/>
-          <p:nvPr/>
-        </p:nvSpPr>
-        <p:spPr>
-          <a:xfrm>
-            <a:off x="457200" y="182880"/>
-            <a:ext cx="8229600" cy="548640"/>
+          <p:cNvPr id="3" name="Shape 1"/>
+          <p:cNvSpPr/>
+          <p:nvPr/>
+        </p:nvSpPr>
+        <p:spPr>
+          <a:xfrm>
+            <a:off x="274320" y="457200"/>
+            <a:ext cx="8595360" cy="822960"/>
+          </a:xfrm>
+          <a:prstGeom prst="rect">
+            <a:avLst/>
+          </a:prstGeom>
+          <a:solidFill>
+            <a:srgbClr val="FFFFFF"/>
+          </a:solidFill>
+          <a:ln/>
+          <a:effectLst>
+            <a:outerShdw sx="100000" sy="100000" kx="0" ky="0" algn="bl" rotWithShape="0" blurRad="101600" dist="25400" dir="5400000">
+              <a:srgbClr val="000000">
+                <a:alpha val="10000"/>
+              </a:srgbClr>
+            </a:outerShdw>
+          </a:effectLst>
+        </p:spPr>
+      </p:sp>
+      <p:sp>
+        <p:nvSpPr>
+          <p:cNvPr id="4" name="Text 2"/>
+          <p:cNvSpPr/>
+          <p:nvPr/>
+        </p:nvSpPr>
+        <p:spPr>
+          <a:xfrm>
+            <a:off x="457200" y="548640"/>
+            <a:ext cx="8229600" cy="640080"/>
           </a:xfrm>
           <a:prstGeom prst="rect">
             <a:avLst/>
@@ -2018,7 +2136,7 @@
             <a:r>
               <a:rPr lang="en-US" sz="2800" b="1" dirty="0">
                 <a:solidFill>
-                  <a:srgbClr val="FFFFFF"/>
+                  <a:srgbClr val="7C3AED"/>
                 </a:solidFill>
               </a:rPr>
               <a:t>2. 资金准备</a:t>
@@ -2029,14 +2147,41 @@
       </p:sp>
       <p:sp>
         <p:nvSpPr>
-          <p:cNvPr id="4" name="Text 2"/>
-          <p:cNvSpPr/>
-          <p:nvPr/>
-        </p:nvSpPr>
-        <p:spPr>
-          <a:xfrm>
-            <a:off x="457200" y="1371600"/>
-            <a:ext cx="8229600" cy="3657600"/>
+          <p:cNvPr id="5" name="Shape 3"/>
+          <p:cNvSpPr/>
+          <p:nvPr/>
+        </p:nvSpPr>
+        <p:spPr>
+          <a:xfrm>
+            <a:off x="274320" y="1554480"/>
+            <a:ext cx="8595360" cy="4389120"/>
+          </a:xfrm>
+          <a:prstGeom prst="rect">
+            <a:avLst/>
+          </a:prstGeom>
+          <a:solidFill>
+            <a:srgbClr val="FFFFFF"/>
+          </a:solidFill>
+          <a:ln/>
+          <a:effectLst>
+            <a:outerShdw sx="100000" sy="100000" kx="0" ky="0" algn="bl" rotWithShape="0" blurRad="101600" dist="25400" dir="5400000">
+              <a:srgbClr val="000000">
+                <a:alpha val="10000"/>
+              </a:srgbClr>
+            </a:outerShdw>
+          </a:effectLst>
+        </p:spPr>
+      </p:sp>
+      <p:sp>
+        <p:nvSpPr>
+          <p:cNvPr id="6" name="Text 4"/>
+          <p:cNvSpPr/>
+          <p:nvPr/>
+        </p:nvSpPr>
+        <p:spPr>
+          <a:xfrm>
+            <a:off x="548640" y="1828800"/>
+            <a:ext cx="8046720" cy="3840480"/>
           </a:xfrm>
           <a:prstGeom prst="rect">
             <a:avLst/>
@@ -2049,6 +2194,9 @@
           <a:lstStyle/>
           <a:p>
             <a:pPr indent="0" marL="0">
+              <a:lnSpc>
+                <a:spcPts val="2400"/>
+              </a:lnSpc>
               <a:buNone/>
             </a:pPr>
             <a:r>
@@ -2063,12 +2211,18 @@
           </a:p>
           <a:p>
             <a:pPr indent="0" marL="0">
+              <a:lnSpc>
+                <a:spcPts val="2400"/>
+              </a:lnSpc>
               <a:buNone/>
             </a:pPr>
             <a:endParaRPr lang="en-US" sz="1600" dirty="0"/>
           </a:p>
           <a:p>
             <a:pPr indent="0" marL="0">
+              <a:lnSpc>
+                <a:spcPts val="2400"/>
+              </a:lnSpc>
               <a:buNone/>
             </a:pPr>
             <a:r>
@@ -2083,6 +2237,9 @@
           </a:p>
           <a:p>
             <a:pPr indent="0" marL="0">
+              <a:lnSpc>
+                <a:spcPts val="2400"/>
+              </a:lnSpc>
               <a:buNone/>
             </a:pPr>
             <a:r>
@@ -2097,6 +2254,9 @@
           </a:p>
           <a:p>
             <a:pPr indent="0" marL="0">
+              <a:lnSpc>
+                <a:spcPts val="2400"/>
+              </a:lnSpc>
               <a:buNone/>
             </a:pPr>
             <a:r>
@@ -2111,6 +2271,9 @@
           </a:p>
           <a:p>
             <a:pPr indent="0" marL="0">
+              <a:lnSpc>
+                <a:spcPts val="2400"/>
+              </a:lnSpc>
               <a:buNone/>
             </a:pPr>
             <a:r>
@@ -2127,7 +2290,7 @@
       </p:sp>
       <p:sp>
         <p:nvSpPr>
-          <p:cNvPr id="5" name="Text 3"/>
+          <p:cNvPr id="7" name="Text 5"/>
           <p:cNvSpPr/>
           <p:nvPr/>
         </p:nvSpPr>
@@ -2163,7 +2326,7 @@
       </p:sp>
       <p:sp>
         <p:nvSpPr>
-          <p:cNvPr id="6" name="Text 4"/>
+          <p:cNvPr id="8" name="Text 6"/>
           <p:cNvSpPr/>
           <p:nvPr/>
         </p:nvSpPr>
@@ -2191,7 +2354,7 @@
                   <a:srgbClr val="9CA3AF"/>
                 </a:solidFill>
               </a:rPr>
-              <a:t>2025/11/26</a:t>
+              <a:t>2025/12/9</a:t>
             </a:r>
             <a:endParaRPr lang="en-US" sz="1000" dirty="0"/>
           </a:p>
@@ -2211,7 +2374,7 @@
     <p:bg>
       <p:bgPr>
         <a:solidFill>
-          <a:srgbClr val="FFFFFF"/>
+          <a:srgbClr val="F9FAFB"/>
         </a:solidFill>
       </p:bgPr>
     </p:bg>
@@ -2238,7 +2401,7 @@
         <p:spPr>
           <a:xfrm>
             <a:off x="0" y="0"/>
-            <a:ext cx="9144000" cy="914400"/>
+            <a:ext cx="137160" cy="6858000"/>
           </a:xfrm>
           <a:prstGeom prst="rect">
             <a:avLst/>
@@ -2251,14 +2414,41 @@
       </p:sp>
       <p:sp>
         <p:nvSpPr>
-          <p:cNvPr id="3" name="Text 1"/>
-          <p:cNvSpPr/>
-          <p:nvPr/>
-        </p:nvSpPr>
-        <p:spPr>
-          <a:xfrm>
-            <a:off x="457200" y="182880"/>
-            <a:ext cx="8229600" cy="548640"/>
+          <p:cNvPr id="3" name="Shape 1"/>
+          <p:cNvSpPr/>
+          <p:nvPr/>
+        </p:nvSpPr>
+        <p:spPr>
+          <a:xfrm>
+            <a:off x="274320" y="457200"/>
+            <a:ext cx="8595360" cy="822960"/>
+          </a:xfrm>
+          <a:prstGeom prst="rect">
+            <a:avLst/>
+          </a:prstGeom>
+          <a:solidFill>
+            <a:srgbClr val="FFFFFF"/>
+          </a:solidFill>
+          <a:ln/>
+          <a:effectLst>
+            <a:outerShdw sx="100000" sy="100000" kx="0" ky="0" algn="bl" rotWithShape="0" blurRad="101600" dist="25400" dir="5400000">
+              <a:srgbClr val="000000">
+                <a:alpha val="10000"/>
+              </a:srgbClr>
+            </a:outerShdw>
+          </a:effectLst>
+        </p:spPr>
+      </p:sp>
+      <p:sp>
+        <p:nvSpPr>
+          <p:cNvPr id="4" name="Text 2"/>
+          <p:cNvSpPr/>
+          <p:nvPr/>
+        </p:nvSpPr>
+        <p:spPr>
+          <a:xfrm>
+            <a:off x="457200" y="548640"/>
+            <a:ext cx="8229600" cy="640080"/>
           </a:xfrm>
           <a:prstGeom prst="rect">
             <a:avLst/>
@@ -2276,7 +2466,7 @@
             <a:r>
               <a:rPr lang="en-US" sz="2800" b="1" dirty="0">
                 <a:solidFill>
-                  <a:srgbClr val="FFFFFF"/>
+                  <a:srgbClr val="7C3AED"/>
                 </a:solidFill>
               </a:rPr>
               <a:t>3. 证照办理</a:t>
@@ -2287,14 +2477,41 @@
       </p:sp>
       <p:sp>
         <p:nvSpPr>
-          <p:cNvPr id="4" name="Text 2"/>
-          <p:cNvSpPr/>
-          <p:nvPr/>
-        </p:nvSpPr>
-        <p:spPr>
-          <a:xfrm>
-            <a:off x="457200" y="1371600"/>
-            <a:ext cx="8229600" cy="3657600"/>
+          <p:cNvPr id="5" name="Shape 3"/>
+          <p:cNvSpPr/>
+          <p:nvPr/>
+        </p:nvSpPr>
+        <p:spPr>
+          <a:xfrm>
+            <a:off x="274320" y="1554480"/>
+            <a:ext cx="8595360" cy="4389120"/>
+          </a:xfrm>
+          <a:prstGeom prst="rect">
+            <a:avLst/>
+          </a:prstGeom>
+          <a:solidFill>
+            <a:srgbClr val="FFFFFF"/>
+          </a:solidFill>
+          <a:ln/>
+          <a:effectLst>
+            <a:outerShdw sx="100000" sy="100000" kx="0" ky="0" algn="bl" rotWithShape="0" blurRad="101600" dist="25400" dir="5400000">
+              <a:srgbClr val="000000">
+                <a:alpha val="10000"/>
+              </a:srgbClr>
+            </a:outerShdw>
+          </a:effectLst>
+        </p:spPr>
+      </p:sp>
+      <p:sp>
+        <p:nvSpPr>
+          <p:cNvPr id="6" name="Text 4"/>
+          <p:cNvSpPr/>
+          <p:nvPr/>
+        </p:nvSpPr>
+        <p:spPr>
+          <a:xfrm>
+            <a:off x="548640" y="1828800"/>
+            <a:ext cx="8046720" cy="3840480"/>
           </a:xfrm>
           <a:prstGeom prst="rect">
             <a:avLst/>
@@ -2307,6 +2524,9 @@
           <a:lstStyle/>
           <a:p>
             <a:pPr indent="0" marL="0">
+              <a:lnSpc>
+                <a:spcPts val="2400"/>
+              </a:lnSpc>
               <a:buNone/>
             </a:pPr>
             <a:r>
@@ -2321,12 +2541,18 @@
           </a:p>
           <a:p>
             <a:pPr indent="0" marL="0">
+              <a:lnSpc>
+                <a:spcPts val="2400"/>
+              </a:lnSpc>
               <a:buNone/>
             </a:pPr>
             <a:endParaRPr lang="en-US" sz="1600" dirty="0"/>
           </a:p>
           <a:p>
             <a:pPr indent="0" marL="0">
+              <a:lnSpc>
+                <a:spcPts val="2400"/>
+              </a:lnSpc>
               <a:buNone/>
             </a:pPr>
             <a:r>
@@ -2341,6 +2567,9 @@
           </a:p>
           <a:p>
             <a:pPr indent="0" marL="0">
+              <a:lnSpc>
+                <a:spcPts val="2400"/>
+              </a:lnSpc>
               <a:buNone/>
             </a:pPr>
             <a:r>
@@ -2355,6 +2584,9 @@
           </a:p>
           <a:p>
             <a:pPr indent="0" marL="0">
+              <a:lnSpc>
+                <a:spcPts val="2400"/>
+              </a:lnSpc>
               <a:buNone/>
             </a:pPr>
             <a:r>
@@ -2371,7 +2603,7 @@
       </p:sp>
       <p:sp>
         <p:nvSpPr>
-          <p:cNvPr id="5" name="Text 3"/>
+          <p:cNvPr id="7" name="Text 5"/>
           <p:cNvSpPr/>
           <p:nvPr/>
         </p:nvSpPr>
@@ -2407,7 +2639,7 @@
       </p:sp>
       <p:sp>
         <p:nvSpPr>
-          <p:cNvPr id="6" name="Text 4"/>
+          <p:cNvPr id="8" name="Text 6"/>
           <p:cNvSpPr/>
           <p:nvPr/>
         </p:nvSpPr>
@@ -2435,7 +2667,7 @@
                   <a:srgbClr val="9CA3AF"/>
                 </a:solidFill>
               </a:rPr>
-              <a:t>2025/11/26</a:t>
+              <a:t>2025/12/9</a:t>
             </a:r>
             <a:endParaRPr lang="en-US" sz="1000" dirty="0"/>
           </a:p>
@@ -2455,7 +2687,7 @@
     <p:bg>
       <p:bgPr>
         <a:solidFill>
-          <a:srgbClr val="FFFFFF"/>
+          <a:srgbClr val="F9FAFB"/>
         </a:solidFill>
       </p:bgPr>
     </p:bg>
@@ -2482,7 +2714,7 @@
         <p:spPr>
           <a:xfrm>
             <a:off x="0" y="0"/>
-            <a:ext cx="9144000" cy="914400"/>
+            <a:ext cx="137160" cy="6858000"/>
           </a:xfrm>
           <a:prstGeom prst="rect">
             <a:avLst/>
@@ -2495,14 +2727,41 @@
       </p:sp>
       <p:sp>
         <p:nvSpPr>
-          <p:cNvPr id="3" name="Text 1"/>
-          <p:cNvSpPr/>
-          <p:nvPr/>
-        </p:nvSpPr>
-        <p:spPr>
-          <a:xfrm>
-            <a:off x="457200" y="182880"/>
-            <a:ext cx="8229600" cy="548640"/>
+          <p:cNvPr id="3" name="Shape 1"/>
+          <p:cNvSpPr/>
+          <p:nvPr/>
+        </p:nvSpPr>
+        <p:spPr>
+          <a:xfrm>
+            <a:off x="274320" y="457200"/>
+            <a:ext cx="8595360" cy="822960"/>
+          </a:xfrm>
+          <a:prstGeom prst="rect">
+            <a:avLst/>
+          </a:prstGeom>
+          <a:solidFill>
+            <a:srgbClr val="FFFFFF"/>
+          </a:solidFill>
+          <a:ln/>
+          <a:effectLst>
+            <a:outerShdw sx="100000" sy="100000" kx="0" ky="0" algn="bl" rotWithShape="0" blurRad="101600" dist="25400" dir="5400000">
+              <a:srgbClr val="000000">
+                <a:alpha val="10000"/>
+              </a:srgbClr>
+            </a:outerShdw>
+          </a:effectLst>
+        </p:spPr>
+      </p:sp>
+      <p:sp>
+        <p:nvSpPr>
+          <p:cNvPr id="4" name="Text 2"/>
+          <p:cNvSpPr/>
+          <p:nvPr/>
+        </p:nvSpPr>
+        <p:spPr>
+          <a:xfrm>
+            <a:off x="457200" y="548640"/>
+            <a:ext cx="8229600" cy="640080"/>
           </a:xfrm>
           <a:prstGeom prst="rect">
             <a:avLst/>
@@ -2520,7 +2779,7 @@
             <a:r>
               <a:rPr lang="en-US" sz="2800" b="1" dirty="0">
                 <a:solidFill>
-                  <a:srgbClr val="FFFFFF"/>
+                  <a:srgbClr val="7C3AED"/>
                 </a:solidFill>
               </a:rPr>
               <a:t>4. 人员招聘</a:t>
@@ -2531,14 +2790,41 @@
       </p:sp>
       <p:sp>
         <p:nvSpPr>
-          <p:cNvPr id="4" name="Text 2"/>
-          <p:cNvSpPr/>
-          <p:nvPr/>
-        </p:nvSpPr>
-        <p:spPr>
-          <a:xfrm>
-            <a:off x="457200" y="1371600"/>
-            <a:ext cx="8229600" cy="3657600"/>
+          <p:cNvPr id="5" name="Shape 3"/>
+          <p:cNvSpPr/>
+          <p:nvPr/>
+        </p:nvSpPr>
+        <p:spPr>
+          <a:xfrm>
+            <a:off x="274320" y="1554480"/>
+            <a:ext cx="8595360" cy="4389120"/>
+          </a:xfrm>
+          <a:prstGeom prst="rect">
+            <a:avLst/>
+          </a:prstGeom>
+          <a:solidFill>
+            <a:srgbClr val="FFFFFF"/>
+          </a:solidFill>
+          <a:ln/>
+          <a:effectLst>
+            <a:outerShdw sx="100000" sy="100000" kx="0" ky="0" algn="bl" rotWithShape="0" blurRad="101600" dist="25400" dir="5400000">
+              <a:srgbClr val="000000">
+                <a:alpha val="10000"/>
+              </a:srgbClr>
+            </a:outerShdw>
+          </a:effectLst>
+        </p:spPr>
+      </p:sp>
+      <p:sp>
+        <p:nvSpPr>
+          <p:cNvPr id="6" name="Text 4"/>
+          <p:cNvSpPr/>
+          <p:nvPr/>
+        </p:nvSpPr>
+        <p:spPr>
+          <a:xfrm>
+            <a:off x="548640" y="1828800"/>
+            <a:ext cx="8046720" cy="3840480"/>
           </a:xfrm>
           <a:prstGeom prst="rect">
             <a:avLst/>
@@ -2551,6 +2837,9 @@
           <a:lstStyle/>
           <a:p>
             <a:pPr indent="0" marL="0">
+              <a:lnSpc>
+                <a:spcPts val="2400"/>
+              </a:lnSpc>
               <a:buNone/>
             </a:pPr>
             <a:r>
@@ -2565,12 +2854,18 @@
           </a:p>
           <a:p>
             <a:pPr indent="0" marL="0">
+              <a:lnSpc>
+                <a:spcPts val="2400"/>
+              </a:lnSpc>
               <a:buNone/>
             </a:pPr>
             <a:endParaRPr lang="en-US" sz="1600" dirty="0"/>
           </a:p>
           <a:p>
             <a:pPr indent="0" marL="0">
+              <a:lnSpc>
+                <a:spcPts val="2400"/>
+              </a:lnSpc>
               <a:buNone/>
             </a:pPr>
             <a:r>
@@ -2585,6 +2880,9 @@
           </a:p>
           <a:p>
             <a:pPr indent="0" marL="0">
+              <a:lnSpc>
+                <a:spcPts val="2400"/>
+              </a:lnSpc>
               <a:buNone/>
             </a:pPr>
             <a:r>
@@ -2599,6 +2897,9 @@
           </a:p>
           <a:p>
             <a:pPr indent="0" marL="0">
+              <a:lnSpc>
+                <a:spcPts val="2400"/>
+              </a:lnSpc>
               <a:buNone/>
             </a:pPr>
             <a:r>
@@ -2615,7 +2916,7 @@
       </p:sp>
       <p:sp>
         <p:nvSpPr>
-          <p:cNvPr id="5" name="Text 3"/>
+          <p:cNvPr id="7" name="Text 5"/>
           <p:cNvSpPr/>
           <p:nvPr/>
         </p:nvSpPr>
@@ -2651,7 +2952,7 @@
       </p:sp>
       <p:sp>
         <p:nvSpPr>
-          <p:cNvPr id="6" name="Text 4"/>
+          <p:cNvPr id="8" name="Text 6"/>
           <p:cNvSpPr/>
           <p:nvPr/>
         </p:nvSpPr>
@@ -2679,7 +2980,7 @@
                   <a:srgbClr val="9CA3AF"/>
                 </a:solidFill>
               </a:rPr>
-              <a:t>2025/11/26</a:t>
+              <a:t>2025/12/9</a:t>
             </a:r>
             <a:endParaRPr lang="en-US" sz="1000" dirty="0"/>
           </a:p>
@@ -2699,7 +3000,7 @@
     <p:bg>
       <p:bgPr>
         <a:solidFill>
-          <a:srgbClr val="FFFFFF"/>
+          <a:srgbClr val="F9FAFB"/>
         </a:solidFill>
       </p:bgPr>
     </p:bg>
@@ -2726,7 +3027,7 @@
         <p:spPr>
           <a:xfrm>
             <a:off x="0" y="0"/>
-            <a:ext cx="9144000" cy="914400"/>
+            <a:ext cx="137160" cy="6858000"/>
           </a:xfrm>
           <a:prstGeom prst="rect">
             <a:avLst/>
@@ -2739,14 +3040,41 @@
       </p:sp>
       <p:sp>
         <p:nvSpPr>
-          <p:cNvPr id="3" name="Text 1"/>
-          <p:cNvSpPr/>
-          <p:nvPr/>
-        </p:nvSpPr>
-        <p:spPr>
-          <a:xfrm>
-            <a:off x="457200" y="182880"/>
-            <a:ext cx="8229600" cy="548640"/>
+          <p:cNvPr id="3" name="Shape 1"/>
+          <p:cNvSpPr/>
+          <p:nvPr/>
+        </p:nvSpPr>
+        <p:spPr>
+          <a:xfrm>
+            <a:off x="274320" y="457200"/>
+            <a:ext cx="8595360" cy="822960"/>
+          </a:xfrm>
+          <a:prstGeom prst="rect">
+            <a:avLst/>
+          </a:prstGeom>
+          <a:solidFill>
+            <a:srgbClr val="FFFFFF"/>
+          </a:solidFill>
+          <a:ln/>
+          <a:effectLst>
+            <a:outerShdw sx="100000" sy="100000" kx="0" ky="0" algn="bl" rotWithShape="0" blurRad="101600" dist="25400" dir="5400000">
+              <a:srgbClr val="000000">
+                <a:alpha val="10000"/>
+              </a:srgbClr>
+            </a:outerShdw>
+          </a:effectLst>
+        </p:spPr>
+      </p:sp>
+      <p:sp>
+        <p:nvSpPr>
+          <p:cNvPr id="4" name="Text 2"/>
+          <p:cNvSpPr/>
+          <p:nvPr/>
+        </p:nvSpPr>
+        <p:spPr>
+          <a:xfrm>
+            <a:off x="457200" y="548640"/>
+            <a:ext cx="8229600" cy="640080"/>
           </a:xfrm>
           <a:prstGeom prst="rect">
             <a:avLst/>
@@ -2764,7 +3092,7 @@
             <a:r>
               <a:rPr lang="en-US" sz="2800" b="1" dirty="0">
                 <a:solidFill>
-                  <a:srgbClr val="FFFFFF"/>
+                  <a:srgbClr val="7C3AED"/>
                 </a:solidFill>
               </a:rPr>
               <a:t>核心原则</a:t>
@@ -2775,14 +3103,41 @@
       </p:sp>
       <p:sp>
         <p:nvSpPr>
-          <p:cNvPr id="4" name="Text 2"/>
-          <p:cNvSpPr/>
-          <p:nvPr/>
-        </p:nvSpPr>
-        <p:spPr>
-          <a:xfrm>
-            <a:off x="457200" y="1371600"/>
-            <a:ext cx="8229600" cy="3657600"/>
+          <p:cNvPr id="5" name="Shape 3"/>
+          <p:cNvSpPr/>
+          <p:nvPr/>
+        </p:nvSpPr>
+        <p:spPr>
+          <a:xfrm>
+            <a:off x="274320" y="1554480"/>
+            <a:ext cx="8595360" cy="4389120"/>
+          </a:xfrm>
+          <a:prstGeom prst="rect">
+            <a:avLst/>
+          </a:prstGeom>
+          <a:solidFill>
+            <a:srgbClr val="FFFFFF"/>
+          </a:solidFill>
+          <a:ln/>
+          <a:effectLst>
+            <a:outerShdw sx="100000" sy="100000" kx="0" ky="0" algn="bl" rotWithShape="0" blurRad="101600" dist="25400" dir="5400000">
+              <a:srgbClr val="000000">
+                <a:alpha val="10000"/>
+              </a:srgbClr>
+            </a:outerShdw>
+          </a:effectLst>
+        </p:spPr>
+      </p:sp>
+      <p:sp>
+        <p:nvSpPr>
+          <p:cNvPr id="6" name="Text 4"/>
+          <p:cNvSpPr/>
+          <p:nvPr/>
+        </p:nvSpPr>
+        <p:spPr>
+          <a:xfrm>
+            <a:off x="548640" y="1828800"/>
+            <a:ext cx="8046720" cy="3840480"/>
           </a:xfrm>
           <a:prstGeom prst="rect">
             <a:avLst/>
@@ -2795,6 +3150,9 @@
           <a:lstStyle/>
           <a:p>
             <a:pPr indent="0" marL="0">
+              <a:lnSpc>
+                <a:spcPts val="2400"/>
+              </a:lnSpc>
               <a:buNone/>
             </a:pPr>
             <a:r>
@@ -2811,7 +3169,7 @@
       </p:sp>
       <p:sp>
         <p:nvSpPr>
-          <p:cNvPr id="5" name="Text 3"/>
+          <p:cNvPr id="7" name="Text 5"/>
           <p:cNvSpPr/>
           <p:nvPr/>
         </p:nvSpPr>
@@ -2847,7 +3205,7 @@
       </p:sp>
       <p:sp>
         <p:nvSpPr>
-          <p:cNvPr id="6" name="Text 4"/>
+          <p:cNvPr id="8" name="Text 6"/>
           <p:cNvSpPr/>
           <p:nvPr/>
         </p:nvSpPr>
@@ -2875,7 +3233,7 @@
                   <a:srgbClr val="9CA3AF"/>
                 </a:solidFill>
               </a:rPr>
-              <a:t>2025/11/26</a:t>
+              <a:t>2025/12/9</a:t>
             </a:r>
             <a:endParaRPr lang="en-US" sz="1000" dirty="0"/>
           </a:p>
@@ -2895,7 +3253,7 @@
     <p:bg>
       <p:bgPr>
         <a:solidFill>
-          <a:srgbClr val="FFFFFF"/>
+          <a:srgbClr val="F9FAFB"/>
         </a:solidFill>
       </p:bgPr>
     </p:bg>
@@ -2922,7 +3280,7 @@
         <p:spPr>
           <a:xfrm>
             <a:off x="0" y="0"/>
-            <a:ext cx="9144000" cy="914400"/>
+            <a:ext cx="137160" cy="6858000"/>
           </a:xfrm>
           <a:prstGeom prst="rect">
             <a:avLst/>
@@ -2935,14 +3293,41 @@
       </p:sp>
       <p:sp>
         <p:nvSpPr>
-          <p:cNvPr id="3" name="Text 1"/>
-          <p:cNvSpPr/>
-          <p:nvPr/>
-        </p:nvSpPr>
-        <p:spPr>
-          <a:xfrm>
-            <a:off x="457200" y="182880"/>
-            <a:ext cx="8229600" cy="548640"/>
+          <p:cNvPr id="3" name="Shape 1"/>
+          <p:cNvSpPr/>
+          <p:nvPr/>
+        </p:nvSpPr>
+        <p:spPr>
+          <a:xfrm>
+            <a:off x="274320" y="457200"/>
+            <a:ext cx="8595360" cy="822960"/>
+          </a:xfrm>
+          <a:prstGeom prst="rect">
+            <a:avLst/>
+          </a:prstGeom>
+          <a:solidFill>
+            <a:srgbClr val="FFFFFF"/>
+          </a:solidFill>
+          <a:ln/>
+          <a:effectLst>
+            <a:outerShdw sx="100000" sy="100000" kx="0" ky="0" algn="bl" rotWithShape="0" blurRad="101600" dist="25400" dir="5400000">
+              <a:srgbClr val="000000">
+                <a:alpha val="10000"/>
+              </a:srgbClr>
+            </a:outerShdw>
+          </a:effectLst>
+        </p:spPr>
+      </p:sp>
+      <p:sp>
+        <p:nvSpPr>
+          <p:cNvPr id="4" name="Text 2"/>
+          <p:cNvSpPr/>
+          <p:nvPr/>
+        </p:nvSpPr>
+        <p:spPr>
+          <a:xfrm>
+            <a:off x="457200" y="548640"/>
+            <a:ext cx="8229600" cy="640080"/>
           </a:xfrm>
           <a:prstGeom prst="rect">
             <a:avLst/>
@@ -2960,7 +3345,7 @@
             <a:r>
               <a:rPr lang="en-US" sz="2800" b="1" dirty="0">
                 <a:solidFill>
-                  <a:srgbClr val="FFFFFF"/>
+                  <a:srgbClr val="7C3AED"/>
                 </a:solidFill>
               </a:rPr>
               <a:t>优质地段特征</a:t>
@@ -2971,14 +3356,41 @@
       </p:sp>
       <p:sp>
         <p:nvSpPr>
-          <p:cNvPr id="4" name="Text 2"/>
-          <p:cNvSpPr/>
-          <p:nvPr/>
-        </p:nvSpPr>
-        <p:spPr>
-          <a:xfrm>
-            <a:off x="457200" y="1371600"/>
-            <a:ext cx="8229600" cy="3657600"/>
+          <p:cNvPr id="5" name="Shape 3"/>
+          <p:cNvSpPr/>
+          <p:nvPr/>
+        </p:nvSpPr>
+        <p:spPr>
+          <a:xfrm>
+            <a:off x="274320" y="1554480"/>
+            <a:ext cx="8595360" cy="4389120"/>
+          </a:xfrm>
+          <a:prstGeom prst="rect">
+            <a:avLst/>
+          </a:prstGeom>
+          <a:solidFill>
+            <a:srgbClr val="FFFFFF"/>
+          </a:solidFill>
+          <a:ln/>
+          <a:effectLst>
+            <a:outerShdw sx="100000" sy="100000" kx="0" ky="0" algn="bl" rotWithShape="0" blurRad="101600" dist="25400" dir="5400000">
+              <a:srgbClr val="000000">
+                <a:alpha val="10000"/>
+              </a:srgbClr>
+            </a:outerShdw>
+          </a:effectLst>
+        </p:spPr>
+      </p:sp>
+      <p:sp>
+        <p:nvSpPr>
+          <p:cNvPr id="6" name="Text 4"/>
+          <p:cNvSpPr/>
+          <p:nvPr/>
+        </p:nvSpPr>
+        <p:spPr>
+          <a:xfrm>
+            <a:off x="548640" y="1828800"/>
+            <a:ext cx="8046720" cy="3840480"/>
           </a:xfrm>
           <a:prstGeom prst="rect">
             <a:avLst/>
@@ -2991,6 +3403,9 @@
           <a:lstStyle/>
           <a:p>
             <a:pPr indent="0" marL="0">
+              <a:lnSpc>
+                <a:spcPts val="2400"/>
+              </a:lnSpc>
               <a:buNone/>
             </a:pPr>
             <a:r>
@@ -3005,6 +3420,9 @@
           </a:p>
           <a:p>
             <a:pPr indent="0" marL="0">
+              <a:lnSpc>
+                <a:spcPts val="2400"/>
+              </a:lnSpc>
               <a:buNone/>
             </a:pPr>
             <a:r>
@@ -3019,6 +3437,9 @@
           </a:p>
           <a:p>
             <a:pPr indent="0" marL="0">
+              <a:lnSpc>
+                <a:spcPts val="2400"/>
+              </a:lnSpc>
               <a:buNone/>
             </a:pPr>
             <a:r>
@@ -3033,6 +3454,9 @@
           </a:p>
           <a:p>
             <a:pPr indent="0" marL="0">
+              <a:lnSpc>
+                <a:spcPts val="2400"/>
+              </a:lnSpc>
               <a:buNone/>
             </a:pPr>
             <a:r>
@@ -3049,7 +3473,7 @@
       </p:sp>
       <p:sp>
         <p:nvSpPr>
-          <p:cNvPr id="5" name="Text 3"/>
+          <p:cNvPr id="7" name="Text 5"/>
           <p:cNvSpPr/>
           <p:nvPr/>
         </p:nvSpPr>
@@ -3085,7 +3509,7 @@
       </p:sp>
       <p:sp>
         <p:nvSpPr>
-          <p:cNvPr id="6" name="Text 4"/>
+          <p:cNvPr id="8" name="Text 6"/>
           <p:cNvSpPr/>
           <p:nvPr/>
         </p:nvSpPr>
@@ -3113,7 +3537,7 @@
                   <a:srgbClr val="9CA3AF"/>
                 </a:solidFill>
               </a:rPr>
-              <a:t>2025/11/26</a:t>
+              <a:t>2025/12/9</a:t>
             </a:r>
             <a:endParaRPr lang="en-US" sz="1000" dirty="0"/>
           </a:p>
@@ -3133,7 +3557,7 @@
     <p:bg>
       <p:bgPr>
         <a:solidFill>
-          <a:srgbClr val="FFFFFF"/>
+          <a:srgbClr val="F9FAFB"/>
         </a:solidFill>
       </p:bgPr>
     </p:bg>
@@ -3160,7 +3584,7 @@
         <p:spPr>
           <a:xfrm>
             <a:off x="0" y="0"/>
-            <a:ext cx="9144000" cy="914400"/>
+            <a:ext cx="137160" cy="6858000"/>
           </a:xfrm>
           <a:prstGeom prst="rect">
             <a:avLst/>
@@ -3173,14 +3597,41 @@
       </p:sp>
       <p:sp>
         <p:nvSpPr>
-          <p:cNvPr id="3" name="Text 1"/>
-          <p:cNvSpPr/>
-          <p:nvPr/>
-        </p:nvSpPr>
-        <p:spPr>
-          <a:xfrm>
-            <a:off x="457200" y="182880"/>
-            <a:ext cx="8229600" cy="548640"/>
+          <p:cNvPr id="3" name="Shape 1"/>
+          <p:cNvSpPr/>
+          <p:nvPr/>
+        </p:nvSpPr>
+        <p:spPr>
+          <a:xfrm>
+            <a:off x="274320" y="457200"/>
+            <a:ext cx="8595360" cy="822960"/>
+          </a:xfrm>
+          <a:prstGeom prst="rect">
+            <a:avLst/>
+          </a:prstGeom>
+          <a:solidFill>
+            <a:srgbClr val="FFFFFF"/>
+          </a:solidFill>
+          <a:ln/>
+          <a:effectLst>
+            <a:outerShdw sx="100000" sy="100000" kx="0" ky="0" algn="bl" rotWithShape="0" blurRad="101600" dist="25400" dir="5400000">
+              <a:srgbClr val="000000">
+                <a:alpha val="10000"/>
+              </a:srgbClr>
+            </a:outerShdw>
+          </a:effectLst>
+        </p:spPr>
+      </p:sp>
+      <p:sp>
+        <p:nvSpPr>
+          <p:cNvPr id="4" name="Text 2"/>
+          <p:cNvSpPr/>
+          <p:nvPr/>
+        </p:nvSpPr>
+        <p:spPr>
+          <a:xfrm>
+            <a:off x="457200" y="548640"/>
+            <a:ext cx="8229600" cy="640080"/>
           </a:xfrm>
           <a:prstGeom prst="rect">
             <a:avLst/>
@@ -3198,7 +3649,7 @@
             <a:r>
               <a:rPr lang="en-US" sz="2800" b="1" dirty="0">
                 <a:solidFill>
-                  <a:srgbClr val="FFFFFF"/>
+                  <a:srgbClr val="7C3AED"/>
                 </a:solidFill>
               </a:rPr>
               <a:t>成本考虑</a:t>
@@ -3209,14 +3660,41 @@
       </p:sp>
       <p:sp>
         <p:nvSpPr>
-          <p:cNvPr id="4" name="Text 2"/>
-          <p:cNvSpPr/>
-          <p:nvPr/>
-        </p:nvSpPr>
-        <p:spPr>
-          <a:xfrm>
-            <a:off x="457200" y="1371600"/>
-            <a:ext cx="8229600" cy="3657600"/>
+          <p:cNvPr id="5" name="Shape 3"/>
+          <p:cNvSpPr/>
+          <p:nvPr/>
+        </p:nvSpPr>
+        <p:spPr>
+          <a:xfrm>
+            <a:off x="274320" y="1554480"/>
+            <a:ext cx="8595360" cy="4389120"/>
+          </a:xfrm>
+          <a:prstGeom prst="rect">
+            <a:avLst/>
+          </a:prstGeom>
+          <a:solidFill>
+            <a:srgbClr val="FFFFFF"/>
+          </a:solidFill>
+          <a:ln/>
+          <a:effectLst>
+            <a:outerShdw sx="100000" sy="100000" kx="0" ky="0" algn="bl" rotWithShape="0" blurRad="101600" dist="25400" dir="5400000">
+              <a:srgbClr val="000000">
+                <a:alpha val="10000"/>
+              </a:srgbClr>
+            </a:outerShdw>
+          </a:effectLst>
+        </p:spPr>
+      </p:sp>
+      <p:sp>
+        <p:nvSpPr>
+          <p:cNvPr id="6" name="Text 4"/>
+          <p:cNvSpPr/>
+          <p:nvPr/>
+        </p:nvSpPr>
+        <p:spPr>
+          <a:xfrm>
+            <a:off x="548640" y="1828800"/>
+            <a:ext cx="8046720" cy="3840480"/>
           </a:xfrm>
           <a:prstGeom prst="rect">
             <a:avLst/>
@@ -3229,6 +3707,9 @@
           <a:lstStyle/>
           <a:p>
             <a:pPr indent="0" marL="0">
+              <a:lnSpc>
+                <a:spcPts val="2400"/>
+              </a:lnSpc>
               <a:buNone/>
             </a:pPr>
             <a:r>
@@ -3243,6 +3724,9 @@
           </a:p>
           <a:p>
             <a:pPr indent="0" marL="0">
+              <a:lnSpc>
+                <a:spcPts val="2400"/>
+              </a:lnSpc>
               <a:buNone/>
             </a:pPr>
             <a:r>
@@ -3257,6 +3741,9 @@
           </a:p>
           <a:p>
             <a:pPr indent="0" marL="0">
+              <a:lnSpc>
+                <a:spcPts val="2400"/>
+              </a:lnSpc>
               <a:buNone/>
             </a:pPr>
             <a:r>
@@ -3273,7 +3760,7 @@
       </p:sp>
       <p:sp>
         <p:nvSpPr>
-          <p:cNvPr id="5" name="Text 3"/>
+          <p:cNvPr id="7" name="Text 5"/>
           <p:cNvSpPr/>
           <p:nvPr/>
         </p:nvSpPr>
@@ -3309,7 +3796,7 @@
       </p:sp>
       <p:sp>
         <p:nvSpPr>
-          <p:cNvPr id="6" name="Text 4"/>
+          <p:cNvPr id="8" name="Text 6"/>
           <p:cNvSpPr/>
           <p:nvPr/>
         </p:nvSpPr>
@@ -3337,7 +3824,7 @@
                   <a:srgbClr val="9CA3AF"/>
                 </a:solidFill>
               </a:rPr>
-              <a:t>2025/11/26</a:t>
+              <a:t>2025/12/9</a:t>
             </a:r>
             <a:endParaRPr lang="en-US" sz="1000" dirty="0"/>
           </a:p>

--- a/test-output.pptx
+++ b/test-output.pptx
@@ -1711,7 +1711,7 @@
                   <a:srgbClr val="FFFFFF"/>
                 </a:solidFill>
               </a:rPr>
-              <a:t>2025/12/9</a:t>
+              <a:t>2026/2/26</a:t>
             </a:r>
             <a:endParaRPr lang="en-US" sz="1400" dirty="0"/>
           </a:p>
@@ -2024,7 +2024,7 @@
                   <a:srgbClr val="9CA3AF"/>
                 </a:solidFill>
               </a:rPr>
-              <a:t>2025/12/9</a:t>
+              <a:t>2026/2/26</a:t>
             </a:r>
             <a:endParaRPr lang="en-US" sz="1000" dirty="0"/>
           </a:p>
@@ -2354,7 +2354,7 @@
                   <a:srgbClr val="9CA3AF"/>
                 </a:solidFill>
               </a:rPr>
-              <a:t>2025/12/9</a:t>
+              <a:t>2026/2/26</a:t>
             </a:r>
             <a:endParaRPr lang="en-US" sz="1000" dirty="0"/>
           </a:p>
@@ -2667,7 +2667,7 @@
                   <a:srgbClr val="9CA3AF"/>
                 </a:solidFill>
               </a:rPr>
-              <a:t>2025/12/9</a:t>
+              <a:t>2026/2/26</a:t>
             </a:r>
             <a:endParaRPr lang="en-US" sz="1000" dirty="0"/>
           </a:p>
@@ -2980,7 +2980,7 @@
                   <a:srgbClr val="9CA3AF"/>
                 </a:solidFill>
               </a:rPr>
-              <a:t>2025/12/9</a:t>
+              <a:t>2026/2/26</a:t>
             </a:r>
             <a:endParaRPr lang="en-US" sz="1000" dirty="0"/>
           </a:p>
@@ -3233,7 +3233,7 @@
                   <a:srgbClr val="9CA3AF"/>
                 </a:solidFill>
               </a:rPr>
-              <a:t>2025/12/9</a:t>
+              <a:t>2026/2/26</a:t>
             </a:r>
             <a:endParaRPr lang="en-US" sz="1000" dirty="0"/>
           </a:p>
@@ -3537,7 +3537,7 @@
                   <a:srgbClr val="9CA3AF"/>
                 </a:solidFill>
               </a:rPr>
-              <a:t>2025/12/9</a:t>
+              <a:t>2026/2/26</a:t>
             </a:r>
             <a:endParaRPr lang="en-US" sz="1000" dirty="0"/>
           </a:p>
@@ -3824,7 +3824,7 @@
                   <a:srgbClr val="9CA3AF"/>
                 </a:solidFill>
               </a:rPr>
-              <a:t>2025/12/9</a:t>
+              <a:t>2026/2/26</a:t>
             </a:r>
             <a:endParaRPr lang="en-US" sz="1000" dirty="0"/>
           </a:p>
